--- a/SQL/Intro To SQL Day 2.pptx
+++ b/SQL/Intro To SQL Day 2.pptx
@@ -219,7 +219,7 @@
           <a:p>
             <a:fld id="{1A54F46A-3CF5-FC49-9B8A-183B98D15B94}" type="datetimeFigureOut">
               <a:rPr lang="en-US" smtClean="0"/>
-              <a:t>12/25/24</a:t>
+              <a:t>6/23/26</a:t>
             </a:fld>
             <a:endParaRPr lang="en-US"/>
           </a:p>
@@ -717,7 +717,7 @@
           <a:p>
             <a:fld id="{046598D6-C04D-9446-A58F-36E01C46C344}" type="datetimeFigureOut">
               <a:rPr lang="en-US" smtClean="0"/>
-              <a:t>12/25/24</a:t>
+              <a:t>6/23/26</a:t>
             </a:fld>
             <a:endParaRPr lang="en-US"/>
           </a:p>
@@ -915,7 +915,7 @@
           <a:p>
             <a:fld id="{046598D6-C04D-9446-A58F-36E01C46C344}" type="datetimeFigureOut">
               <a:rPr lang="en-US" smtClean="0"/>
-              <a:t>12/25/24</a:t>
+              <a:t>6/23/26</a:t>
             </a:fld>
             <a:endParaRPr lang="en-US"/>
           </a:p>
@@ -1123,7 +1123,7 @@
           <a:p>
             <a:fld id="{046598D6-C04D-9446-A58F-36E01C46C344}" type="datetimeFigureOut">
               <a:rPr lang="en-US" smtClean="0"/>
-              <a:t>12/25/24</a:t>
+              <a:t>6/23/26</a:t>
             </a:fld>
             <a:endParaRPr lang="en-US"/>
           </a:p>
@@ -1321,7 +1321,7 @@
           <a:p>
             <a:fld id="{046598D6-C04D-9446-A58F-36E01C46C344}" type="datetimeFigureOut">
               <a:rPr lang="en-US" smtClean="0"/>
-              <a:t>12/25/24</a:t>
+              <a:t>6/23/26</a:t>
             </a:fld>
             <a:endParaRPr lang="en-US"/>
           </a:p>
@@ -1596,7 +1596,7 @@
           <a:p>
             <a:fld id="{046598D6-C04D-9446-A58F-36E01C46C344}" type="datetimeFigureOut">
               <a:rPr lang="en-US" smtClean="0"/>
-              <a:t>12/25/24</a:t>
+              <a:t>6/23/26</a:t>
             </a:fld>
             <a:endParaRPr lang="en-US"/>
           </a:p>
@@ -1861,7 +1861,7 @@
           <a:p>
             <a:fld id="{046598D6-C04D-9446-A58F-36E01C46C344}" type="datetimeFigureOut">
               <a:rPr lang="en-US" smtClean="0"/>
-              <a:t>12/25/24</a:t>
+              <a:t>6/23/26</a:t>
             </a:fld>
             <a:endParaRPr lang="en-US"/>
           </a:p>
@@ -2273,7 +2273,7 @@
           <a:p>
             <a:fld id="{046598D6-C04D-9446-A58F-36E01C46C344}" type="datetimeFigureOut">
               <a:rPr lang="en-US" smtClean="0"/>
-              <a:t>12/25/24</a:t>
+              <a:t>6/23/26</a:t>
             </a:fld>
             <a:endParaRPr lang="en-US"/>
           </a:p>
@@ -2414,7 +2414,7 @@
           <a:p>
             <a:fld id="{046598D6-C04D-9446-A58F-36E01C46C344}" type="datetimeFigureOut">
               <a:rPr lang="en-US" smtClean="0"/>
-              <a:t>12/25/24</a:t>
+              <a:t>6/23/26</a:t>
             </a:fld>
             <a:endParaRPr lang="en-US"/>
           </a:p>
@@ -2527,7 +2527,7 @@
           <a:p>
             <a:fld id="{046598D6-C04D-9446-A58F-36E01C46C344}" type="datetimeFigureOut">
               <a:rPr lang="en-US" smtClean="0"/>
-              <a:t>12/25/24</a:t>
+              <a:t>6/23/26</a:t>
             </a:fld>
             <a:endParaRPr lang="en-US"/>
           </a:p>
@@ -2838,7 +2838,7 @@
           <a:p>
             <a:fld id="{046598D6-C04D-9446-A58F-36E01C46C344}" type="datetimeFigureOut">
               <a:rPr lang="en-US" smtClean="0"/>
-              <a:t>12/25/24</a:t>
+              <a:t>6/23/26</a:t>
             </a:fld>
             <a:endParaRPr lang="en-US"/>
           </a:p>
@@ -3126,7 +3126,7 @@
           <a:p>
             <a:fld id="{046598D6-C04D-9446-A58F-36E01C46C344}" type="datetimeFigureOut">
               <a:rPr lang="en-US" smtClean="0"/>
-              <a:t>12/25/24</a:t>
+              <a:t>6/23/26</a:t>
             </a:fld>
             <a:endParaRPr lang="en-US"/>
           </a:p>
@@ -3367,7 +3367,7 @@
           <a:p>
             <a:fld id="{046598D6-C04D-9446-A58F-36E01C46C344}" type="datetimeFigureOut">
               <a:rPr lang="en-US" smtClean="0"/>
-              <a:t>12/25/24</a:t>
+              <a:t>6/23/26</a:t>
             </a:fld>
             <a:endParaRPr lang="en-US"/>
           </a:p>
@@ -4049,7 +4049,7 @@
                 </a:highlight>
                 <a:latin typeface="Roboto Mono" pitchFamily="49" charset="0"/>
               </a:rPr>
-              <a:t>&gt;100)</a:t>
+              <a:t>&gt;10)</a:t>
             </a:r>
           </a:p>
           <a:p>
@@ -4117,7 +4117,7 @@
                 </a:highlight>
                 <a:latin typeface="Roboto Mono" pitchFamily="49" charset="0"/>
               </a:rPr>
-              <a:t>&gt;100)</a:t>
+              <a:t>&gt;10)</a:t>
             </a:r>
           </a:p>
           <a:p>
@@ -4245,7 +4245,7 @@
           <a:p>
             <a:r>
               <a:rPr lang="en-US" dirty="0"/>
-              <a:t>%	Modulus</a:t>
+              <a:t>%	Modulus. </a:t>
             </a:r>
           </a:p>
         </p:txBody>
@@ -7277,7 +7277,7 @@
           <a:p>
             <a:r>
               <a:rPr lang="en-US" dirty="0"/>
-              <a:t>=	Equal to</a:t>
+              <a:t>=	Equal to  ==</a:t>
             </a:r>
           </a:p>
           <a:p>
@@ -7307,7 +7307,7 @@
           <a:p>
             <a:r>
               <a:rPr lang="en-US" dirty="0"/>
-              <a:t>&lt;&gt;	Not Equal to.</a:t>
+              <a:t>&lt;&gt;	Not Equal to.  !=</a:t>
             </a:r>
           </a:p>
         </p:txBody>
@@ -8387,7 +8387,7 @@
                 </a:highlight>
                 <a:latin typeface="Roboto Mono" pitchFamily="49" charset="0"/>
               </a:rPr>
-              <a:t>IN ('Clothing &gt; </a:t>
+              <a:t>IN ('Clothing’, </a:t>
             </a:r>
             <a:r>
               <a:rPr lang="en-US" sz="2000" b="0" dirty="0" err="1">
